--- a/class/cloud_infra_mgmt/05주차_Kubernetes핵심1/01_강의자료/2차시_Service타입비교와NodePort실습.pptx
+++ b/class/cloud_infra_mgmt/05주차_Kubernetes핵심1/01_강의자료/2차시_Service타입비교와NodePort실습.pptx
@@ -5093,7 +5093,7 @@
           <a:p>
             <a:pPr>
               <a:lnSpc>
-                <a:spcPct val="115000"/>
+                <a:spcPct val="149500"/>
               </a:lnSpc>
             </a:pPr>
             <a:r>
@@ -5118,7 +5118,7 @@
           <a:p>
             <a:pPr>
               <a:lnSpc>
-                <a:spcPct val="115000"/>
+                <a:spcPct val="149500"/>
               </a:lnSpc>
             </a:pPr>
             <a:r>
@@ -5143,7 +5143,7 @@
           <a:p>
             <a:pPr>
               <a:lnSpc>
-                <a:spcPct val="115000"/>
+                <a:spcPct val="149500"/>
               </a:lnSpc>
             </a:pPr>
             <a:r>
@@ -6392,16 +6392,104 @@
       </p:sp>
       <p:sp>
         <p:nvSpPr>
-          <p:cNvPr id="7" name="Isosceles Triangle 6"/>
+          <p:cNvPr id="7" name="Rectangle 6"/>
           <p:cNvSpPr/>
           <p:nvPr/>
         </p:nvSpPr>
         <p:spPr>
-          <a:xfrm rot="5400000">
-            <a:off x="3495751" y="1673352"/>
-            <a:ext cx="146304" cy="146304"/>
-          </a:xfrm>
-          <a:prstGeom prst="triangle">
+          <a:xfrm>
+            <a:off x="5096865" y="1730959"/>
+            <a:ext cx="1995220" cy="31089"/>
+          </a:xfrm>
+          <a:prstGeom prst="rect">
+            <a:avLst/>
+          </a:prstGeom>
+          <a:solidFill>
+            <a:srgbClr val="14B8A6"/>
+          </a:solidFill>
+          <a:ln>
+            <a:noFill/>
+          </a:ln>
+          <a:effectLst/>
+        </p:spPr>
+        <p:style>
+          <a:lnRef idx="1">
+            <a:schemeClr val="accent1"/>
+          </a:lnRef>
+          <a:fillRef idx="3">
+            <a:schemeClr val="accent1"/>
+          </a:fillRef>
+          <a:effectRef idx="2">
+            <a:schemeClr val="accent1"/>
+          </a:effectRef>
+          <a:fontRef idx="minor">
+            <a:schemeClr val="lt1"/>
+          </a:fontRef>
+        </p:style>
+        <p:txBody>
+          <a:bodyPr rtlCol="0" anchor="ctr"/>
+          <a:lstStyle/>
+          <a:p>
+            <a:pPr algn="ctr"/>
+          </a:p>
+        </p:txBody>
+      </p:sp>
+      <p:sp>
+        <p:nvSpPr>
+          <p:cNvPr id="8" name="Rectangle 7"/>
+          <p:cNvSpPr/>
+          <p:nvPr/>
+        </p:nvSpPr>
+        <p:spPr>
+          <a:xfrm>
+            <a:off x="7622438" y="1730959"/>
+            <a:ext cx="1995220" cy="31089"/>
+          </a:xfrm>
+          <a:prstGeom prst="rect">
+            <a:avLst/>
+          </a:prstGeom>
+          <a:solidFill>
+            <a:srgbClr val="14B8A6"/>
+          </a:solidFill>
+          <a:ln>
+            <a:noFill/>
+          </a:ln>
+          <a:effectLst/>
+        </p:spPr>
+        <p:style>
+          <a:lnRef idx="1">
+            <a:schemeClr val="accent1"/>
+          </a:lnRef>
+          <a:fillRef idx="3">
+            <a:schemeClr val="accent1"/>
+          </a:fillRef>
+          <a:effectRef idx="2">
+            <a:schemeClr val="accent1"/>
+          </a:effectRef>
+          <a:fontRef idx="minor">
+            <a:schemeClr val="lt1"/>
+          </a:fontRef>
+        </p:style>
+        <p:txBody>
+          <a:bodyPr rtlCol="0" anchor="ctr"/>
+          <a:lstStyle/>
+          <a:p>
+            <a:pPr algn="ctr"/>
+          </a:p>
+        </p:txBody>
+      </p:sp>
+      <p:sp>
+        <p:nvSpPr>
+          <p:cNvPr id="9" name="Oval 8"/>
+          <p:cNvSpPr/>
+          <p:nvPr/>
+        </p:nvSpPr>
+        <p:spPr>
+          <a:xfrm>
+            <a:off x="2040940" y="1481328"/>
+            <a:ext cx="530352" cy="530352"/>
+          </a:xfrm>
+          <a:prstGeom prst="ellipse">
             <a:avLst/>
           </a:prstGeom>
           <a:solidFill>
@@ -6436,227 +6524,7 @@
       </p:sp>
       <p:sp>
         <p:nvSpPr>
-          <p:cNvPr id="8" name="Rectangle 7"/>
-          <p:cNvSpPr/>
-          <p:nvPr/>
-        </p:nvSpPr>
-        <p:spPr>
-          <a:xfrm>
-            <a:off x="5096865" y="1730959"/>
-            <a:ext cx="1995220" cy="31089"/>
-          </a:xfrm>
-          <a:prstGeom prst="rect">
-            <a:avLst/>
-          </a:prstGeom>
-          <a:solidFill>
-            <a:srgbClr val="14B8A6"/>
-          </a:solidFill>
-          <a:ln>
-            <a:noFill/>
-          </a:ln>
-          <a:effectLst/>
-        </p:spPr>
-        <p:style>
-          <a:lnRef idx="1">
-            <a:schemeClr val="accent1"/>
-          </a:lnRef>
-          <a:fillRef idx="3">
-            <a:schemeClr val="accent1"/>
-          </a:fillRef>
-          <a:effectRef idx="2">
-            <a:schemeClr val="accent1"/>
-          </a:effectRef>
-          <a:fontRef idx="minor">
-            <a:schemeClr val="lt1"/>
-          </a:fontRef>
-        </p:style>
-        <p:txBody>
-          <a:bodyPr rtlCol="0" anchor="ctr"/>
-          <a:lstStyle/>
-          <a:p>
-            <a:pPr algn="ctr"/>
-          </a:p>
-        </p:txBody>
-      </p:sp>
-      <p:sp>
-        <p:nvSpPr>
-          <p:cNvPr id="9" name="Isosceles Triangle 8"/>
-          <p:cNvSpPr/>
-          <p:nvPr/>
-        </p:nvSpPr>
-        <p:spPr>
-          <a:xfrm rot="5400000">
-            <a:off x="6021324" y="1673352"/>
-            <a:ext cx="146304" cy="146304"/>
-          </a:xfrm>
-          <a:prstGeom prst="triangle">
-            <a:avLst/>
-          </a:prstGeom>
-          <a:solidFill>
-            <a:srgbClr val="0D9488"/>
-          </a:solidFill>
-          <a:ln>
-            <a:noFill/>
-          </a:ln>
-          <a:effectLst/>
-        </p:spPr>
-        <p:style>
-          <a:lnRef idx="1">
-            <a:schemeClr val="accent1"/>
-          </a:lnRef>
-          <a:fillRef idx="3">
-            <a:schemeClr val="accent1"/>
-          </a:fillRef>
-          <a:effectRef idx="2">
-            <a:schemeClr val="accent1"/>
-          </a:effectRef>
-          <a:fontRef idx="minor">
-            <a:schemeClr val="lt1"/>
-          </a:fontRef>
-        </p:style>
-        <p:txBody>
-          <a:bodyPr rtlCol="0" anchor="ctr"/>
-          <a:lstStyle/>
-          <a:p>
-            <a:pPr algn="ctr"/>
-          </a:p>
-        </p:txBody>
-      </p:sp>
-      <p:sp>
-        <p:nvSpPr>
-          <p:cNvPr id="10" name="Rectangle 9"/>
-          <p:cNvSpPr/>
-          <p:nvPr/>
-        </p:nvSpPr>
-        <p:spPr>
-          <a:xfrm>
-            <a:off x="7622438" y="1730959"/>
-            <a:ext cx="1995220" cy="31089"/>
-          </a:xfrm>
-          <a:prstGeom prst="rect">
-            <a:avLst/>
-          </a:prstGeom>
-          <a:solidFill>
-            <a:srgbClr val="14B8A6"/>
-          </a:solidFill>
-          <a:ln>
-            <a:noFill/>
-          </a:ln>
-          <a:effectLst/>
-        </p:spPr>
-        <p:style>
-          <a:lnRef idx="1">
-            <a:schemeClr val="accent1"/>
-          </a:lnRef>
-          <a:fillRef idx="3">
-            <a:schemeClr val="accent1"/>
-          </a:fillRef>
-          <a:effectRef idx="2">
-            <a:schemeClr val="accent1"/>
-          </a:effectRef>
-          <a:fontRef idx="minor">
-            <a:schemeClr val="lt1"/>
-          </a:fontRef>
-        </p:style>
-        <p:txBody>
-          <a:bodyPr rtlCol="0" anchor="ctr"/>
-          <a:lstStyle/>
-          <a:p>
-            <a:pPr algn="ctr"/>
-          </a:p>
-        </p:txBody>
-      </p:sp>
-      <p:sp>
-        <p:nvSpPr>
-          <p:cNvPr id="11" name="Isosceles Triangle 10"/>
-          <p:cNvSpPr/>
-          <p:nvPr/>
-        </p:nvSpPr>
-        <p:spPr>
-          <a:xfrm rot="5400000">
-            <a:off x="8546896" y="1673352"/>
-            <a:ext cx="146304" cy="146304"/>
-          </a:xfrm>
-          <a:prstGeom prst="triangle">
-            <a:avLst/>
-          </a:prstGeom>
-          <a:solidFill>
-            <a:srgbClr val="0D9488"/>
-          </a:solidFill>
-          <a:ln>
-            <a:noFill/>
-          </a:ln>
-          <a:effectLst/>
-        </p:spPr>
-        <p:style>
-          <a:lnRef idx="1">
-            <a:schemeClr val="accent1"/>
-          </a:lnRef>
-          <a:fillRef idx="3">
-            <a:schemeClr val="accent1"/>
-          </a:fillRef>
-          <a:effectRef idx="2">
-            <a:schemeClr val="accent1"/>
-          </a:effectRef>
-          <a:fontRef idx="minor">
-            <a:schemeClr val="lt1"/>
-          </a:fontRef>
-        </p:style>
-        <p:txBody>
-          <a:bodyPr rtlCol="0" anchor="ctr"/>
-          <a:lstStyle/>
-          <a:p>
-            <a:pPr algn="ctr"/>
-          </a:p>
-        </p:txBody>
-      </p:sp>
-      <p:sp>
-        <p:nvSpPr>
-          <p:cNvPr id="12" name="Oval 11"/>
-          <p:cNvSpPr/>
-          <p:nvPr/>
-        </p:nvSpPr>
-        <p:spPr>
-          <a:xfrm>
-            <a:off x="2040940" y="1481328"/>
-            <a:ext cx="530352" cy="530352"/>
-          </a:xfrm>
-          <a:prstGeom prst="ellipse">
-            <a:avLst/>
-          </a:prstGeom>
-          <a:solidFill>
-            <a:srgbClr val="0D9488"/>
-          </a:solidFill>
-          <a:ln>
-            <a:noFill/>
-          </a:ln>
-          <a:effectLst/>
-        </p:spPr>
-        <p:style>
-          <a:lnRef idx="1">
-            <a:schemeClr val="accent1"/>
-          </a:lnRef>
-          <a:fillRef idx="3">
-            <a:schemeClr val="accent1"/>
-          </a:fillRef>
-          <a:effectRef idx="2">
-            <a:schemeClr val="accent1"/>
-          </a:effectRef>
-          <a:fontRef idx="minor">
-            <a:schemeClr val="lt1"/>
-          </a:fontRef>
-        </p:style>
-        <p:txBody>
-          <a:bodyPr rtlCol="0" anchor="ctr"/>
-          <a:lstStyle/>
-          <a:p>
-            <a:pPr algn="ctr"/>
-          </a:p>
-        </p:txBody>
-      </p:sp>
-      <p:sp>
-        <p:nvSpPr>
-          <p:cNvPr id="13" name="TextBox 12"/>
+          <p:cNvPr id="10" name="TextBox 9"/>
           <p:cNvSpPr txBox="1"/>
           <p:nvPr/>
         </p:nvSpPr>
@@ -6691,7 +6559,7 @@
       </p:sp>
       <p:sp>
         <p:nvSpPr>
-          <p:cNvPr id="14" name="Rounded Rectangle 13"/>
+          <p:cNvPr id="11" name="Rounded Rectangle 10"/>
           <p:cNvSpPr/>
           <p:nvPr/>
         </p:nvSpPr>
@@ -6739,7 +6607,7 @@
       </p:sp>
       <p:sp>
         <p:nvSpPr>
-          <p:cNvPr id="15" name="TextBox 14"/>
+          <p:cNvPr id="12" name="TextBox 11"/>
           <p:cNvSpPr txBox="1"/>
           <p:nvPr/>
         </p:nvSpPr>
@@ -6774,7 +6642,7 @@
       </p:sp>
       <p:sp>
         <p:nvSpPr>
-          <p:cNvPr id="16" name="TextBox 15"/>
+          <p:cNvPr id="13" name="TextBox 12"/>
           <p:cNvSpPr txBox="1"/>
           <p:nvPr/>
         </p:nvSpPr>
@@ -6813,7 +6681,7 @@
       </p:sp>
       <p:sp>
         <p:nvSpPr>
-          <p:cNvPr id="17" name="Oval 16"/>
+          <p:cNvPr id="14" name="Oval 13"/>
           <p:cNvSpPr/>
           <p:nvPr/>
         </p:nvSpPr>
@@ -6857,7 +6725,7 @@
       </p:sp>
       <p:sp>
         <p:nvSpPr>
-          <p:cNvPr id="18" name="TextBox 17"/>
+          <p:cNvPr id="15" name="TextBox 14"/>
           <p:cNvSpPr txBox="1"/>
           <p:nvPr/>
         </p:nvSpPr>
@@ -6892,7 +6760,7 @@
       </p:sp>
       <p:sp>
         <p:nvSpPr>
-          <p:cNvPr id="19" name="Rounded Rectangle 18"/>
+          <p:cNvPr id="16" name="Rounded Rectangle 15"/>
           <p:cNvSpPr/>
           <p:nvPr/>
         </p:nvSpPr>
@@ -6940,7 +6808,7 @@
       </p:sp>
       <p:sp>
         <p:nvSpPr>
-          <p:cNvPr id="20" name="TextBox 19"/>
+          <p:cNvPr id="17" name="TextBox 16"/>
           <p:cNvSpPr txBox="1"/>
           <p:nvPr/>
         </p:nvSpPr>
@@ -6975,7 +6843,7 @@
       </p:sp>
       <p:sp>
         <p:nvSpPr>
-          <p:cNvPr id="21" name="TextBox 20"/>
+          <p:cNvPr id="18" name="TextBox 17"/>
           <p:cNvSpPr txBox="1"/>
           <p:nvPr/>
         </p:nvSpPr>
@@ -7014,7 +6882,7 @@
       </p:sp>
       <p:sp>
         <p:nvSpPr>
-          <p:cNvPr id="22" name="Oval 21"/>
+          <p:cNvPr id="19" name="Oval 18"/>
           <p:cNvSpPr/>
           <p:nvPr/>
         </p:nvSpPr>
@@ -7058,7 +6926,7 @@
       </p:sp>
       <p:sp>
         <p:nvSpPr>
-          <p:cNvPr id="23" name="TextBox 22"/>
+          <p:cNvPr id="20" name="TextBox 19"/>
           <p:cNvSpPr txBox="1"/>
           <p:nvPr/>
         </p:nvSpPr>
@@ -7093,7 +6961,7 @@
       </p:sp>
       <p:sp>
         <p:nvSpPr>
-          <p:cNvPr id="24" name="Rounded Rectangle 23"/>
+          <p:cNvPr id="21" name="Rounded Rectangle 20"/>
           <p:cNvSpPr/>
           <p:nvPr/>
         </p:nvSpPr>
@@ -7141,7 +7009,7 @@
       </p:sp>
       <p:sp>
         <p:nvSpPr>
-          <p:cNvPr id="25" name="TextBox 24"/>
+          <p:cNvPr id="22" name="TextBox 21"/>
           <p:cNvSpPr txBox="1"/>
           <p:nvPr/>
         </p:nvSpPr>
@@ -7176,7 +7044,7 @@
       </p:sp>
       <p:sp>
         <p:nvSpPr>
-          <p:cNvPr id="26" name="TextBox 25"/>
+          <p:cNvPr id="23" name="TextBox 22"/>
           <p:cNvSpPr txBox="1"/>
           <p:nvPr/>
         </p:nvSpPr>
@@ -7215,7 +7083,7 @@
       </p:sp>
       <p:sp>
         <p:nvSpPr>
-          <p:cNvPr id="27" name="Oval 26"/>
+          <p:cNvPr id="24" name="Oval 23"/>
           <p:cNvSpPr/>
           <p:nvPr/>
         </p:nvSpPr>
@@ -7259,7 +7127,7 @@
       </p:sp>
       <p:sp>
         <p:nvSpPr>
-          <p:cNvPr id="28" name="TextBox 27"/>
+          <p:cNvPr id="25" name="TextBox 24"/>
           <p:cNvSpPr txBox="1"/>
           <p:nvPr/>
         </p:nvSpPr>
@@ -7294,7 +7162,7 @@
       </p:sp>
       <p:sp>
         <p:nvSpPr>
-          <p:cNvPr id="29" name="Rounded Rectangle 28"/>
+          <p:cNvPr id="26" name="Rounded Rectangle 25"/>
           <p:cNvSpPr/>
           <p:nvPr/>
         </p:nvSpPr>
@@ -7342,7 +7210,7 @@
       </p:sp>
       <p:sp>
         <p:nvSpPr>
-          <p:cNvPr id="30" name="TextBox 29"/>
+          <p:cNvPr id="27" name="TextBox 26"/>
           <p:cNvSpPr txBox="1"/>
           <p:nvPr/>
         </p:nvSpPr>
@@ -7377,7 +7245,7 @@
       </p:sp>
       <p:sp>
         <p:nvSpPr>
-          <p:cNvPr id="31" name="TextBox 30"/>
+          <p:cNvPr id="28" name="TextBox 27"/>
           <p:cNvSpPr txBox="1"/>
           <p:nvPr/>
         </p:nvSpPr>
@@ -7416,7 +7284,7 @@
       </p:sp>
       <p:sp>
         <p:nvSpPr>
-          <p:cNvPr id="32" name="TextBox 31"/>
+          <p:cNvPr id="29" name="TextBox 28"/>
           <p:cNvSpPr txBox="1"/>
           <p:nvPr/>
         </p:nvSpPr>
@@ -7451,7 +7319,7 @@
       </p:sp>
       <p:sp>
         <p:nvSpPr>
-          <p:cNvPr id="33" name="TextBox 32"/>
+          <p:cNvPr id="30" name="TextBox 29"/>
           <p:cNvSpPr txBox="1"/>
           <p:nvPr/>
         </p:nvSpPr>
@@ -7486,7 +7354,7 @@
       </p:sp>
       <p:sp>
         <p:nvSpPr>
-          <p:cNvPr id="34" name="Rectangle 33"/>
+          <p:cNvPr id="31" name="Rectangle 30"/>
           <p:cNvSpPr/>
           <p:nvPr/>
         </p:nvSpPr>
@@ -9301,7 +9169,7 @@
           <a:p>
             <a:pPr>
               <a:lnSpc>
-                <a:spcPct val="115000"/>
+                <a:spcPct val="149500"/>
               </a:lnSpc>
             </a:pPr>
             <a:r>
@@ -9326,7 +9194,7 @@
           <a:p>
             <a:pPr>
               <a:lnSpc>
-                <a:spcPct val="115000"/>
+                <a:spcPct val="149500"/>
               </a:lnSpc>
             </a:pPr>
             <a:r>
@@ -9351,7 +9219,7 @@
           <a:p>
             <a:pPr>
               <a:lnSpc>
-                <a:spcPct val="115000"/>
+                <a:spcPct val="149500"/>
               </a:lnSpc>
             </a:pPr>
             <a:r>
@@ -10085,7 +9953,7 @@
           <a:p>
             <a:pPr>
               <a:lnSpc>
-                <a:spcPct val="115000"/>
+                <a:spcPct val="149500"/>
               </a:lnSpc>
             </a:pPr>
             <a:r>
@@ -10110,7 +9978,7 @@
           <a:p>
             <a:pPr>
               <a:lnSpc>
-                <a:spcPct val="115000"/>
+                <a:spcPct val="149500"/>
               </a:lnSpc>
             </a:pPr>
             <a:r>
@@ -10135,7 +10003,7 @@
           <a:p>
             <a:pPr>
               <a:lnSpc>
-                <a:spcPct val="115000"/>
+                <a:spcPct val="149500"/>
               </a:lnSpc>
             </a:pPr>
             <a:r>
@@ -10526,7 +10394,7 @@
           <a:p>
             <a:pPr>
               <a:lnSpc>
-                <a:spcPct val="115000"/>
+                <a:spcPct val="149500"/>
               </a:lnSpc>
             </a:pPr>
             <a:r>
@@ -10551,7 +10419,7 @@
           <a:p>
             <a:pPr>
               <a:lnSpc>
-                <a:spcPct val="115000"/>
+                <a:spcPct val="149500"/>
               </a:lnSpc>
             </a:pPr>
             <a:r>
@@ -10576,7 +10444,7 @@
           <a:p>
             <a:pPr>
               <a:lnSpc>
-                <a:spcPct val="115000"/>
+                <a:spcPct val="149500"/>
               </a:lnSpc>
             </a:pPr>
             <a:r>

--- a/class/cloud_infra_mgmt/05주차_Kubernetes핵심1/01_강의자료/2차시_Service타입비교와NodePort실습.pptx
+++ b/class/cloud_infra_mgmt/05주차_Kubernetes핵심1/01_강의자료/2차시_Service타입비교와NodePort실습.pptx
@@ -4717,6 +4717,8 @@
                   <a:srgbClr val="14B8A6"/>
                 </a:solidFill>
                 <a:latin typeface="맑은 고딕"/>
+                <a:ea typeface="맑은 고딕"/>
+                <a:cs typeface="맑은 고딕"/>
               </a:rPr>
               <a:t>클라우드인프라관리  ·  5주차 2차시</a:t>
             </a:r>
@@ -4752,6 +4754,8 @@
                   <a:srgbClr val="FFFFFF"/>
                 </a:solidFill>
                 <a:latin typeface="맑은 고딕"/>
+                <a:ea typeface="맑은 고딕"/>
+                <a:cs typeface="맑은 고딕"/>
               </a:rPr>
               <a:t>Service 타입 비교와</a:t>
             </a:r>
@@ -4764,6 +4768,8 @@
                   <a:srgbClr val="FFFFFF"/>
                 </a:solidFill>
                 <a:latin typeface="맑은 고딕"/>
+                <a:ea typeface="맑은 고딕"/>
+                <a:cs typeface="맑은 고딕"/>
               </a:rPr>
               <a:t>NodePort 실습</a:t>
             </a:r>
@@ -4799,6 +4805,8 @@
                   <a:srgbClr val="C9D3E6"/>
                 </a:solidFill>
                 <a:latin typeface="맑은 고딕"/>
+                <a:ea typeface="맑은 고딕"/>
+                <a:cs typeface="맑은 고딕"/>
               </a:rPr>
               <a:t>ClusterIP · NodePort · LoadBalancer</a:t>
             </a:r>
@@ -4834,6 +4842,8 @@
                   <a:srgbClr val="FFFFFF"/>
                 </a:solidFill>
                 <a:latin typeface="맑은 고딕"/>
+                <a:ea typeface="맑은 고딕"/>
+                <a:cs typeface="맑은 고딕"/>
               </a:rPr>
               <a:t>영남이공대학교 김지윤교수</a:t>
             </a:r>
@@ -4993,6 +5003,8 @@
                   <a:srgbClr val="14213D"/>
                 </a:solidFill>
                 <a:latin typeface="맑은 고딕"/>
+                <a:ea typeface="맑은 고딕"/>
+                <a:cs typeface="맑은 고딕"/>
               </a:rPr>
               <a:t>03</a:t>
             </a:r>
@@ -5028,6 +5040,8 @@
                   <a:srgbClr val="14B8A6"/>
                 </a:solidFill>
                 <a:latin typeface="맑은 고딕"/>
+                <a:ea typeface="맑은 고딕"/>
+                <a:cs typeface="맑은 고딕"/>
               </a:rPr>
               <a:t>실습 안내</a:t>
             </a:r>
@@ -5063,6 +5077,8 @@
                   <a:srgbClr val="FFFFFF"/>
                 </a:solidFill>
                 <a:latin typeface="맑은 고딕"/>
+                <a:ea typeface="맑은 고딕"/>
+                <a:cs typeface="맑은 고딕"/>
               </a:rPr>
               <a:t>VM 과제 — 동일 실습</a:t>
             </a:r>
@@ -5102,6 +5118,8 @@
                   <a:srgbClr val="0D9488"/>
                 </a:solidFill>
                 <a:latin typeface="맑은 고딕"/>
+                <a:ea typeface="맑은 고딕"/>
+                <a:cs typeface="맑은 고딕"/>
               </a:rPr>
               <a:t>●  </a:t>
             </a:r>
@@ -5111,6 +5129,8 @@
                   <a:srgbClr val="222733"/>
                 </a:solidFill>
                 <a:latin typeface="맑은 고딕"/>
+                <a:ea typeface="맑은 고딕"/>
+                <a:cs typeface="맑은 고딕"/>
               </a:rPr>
               <a:t>개인 VM에서 동일하게 kubectl expose 실행</a:t>
             </a:r>
@@ -5127,6 +5147,8 @@
                   <a:srgbClr val="0D9488"/>
                 </a:solidFill>
                 <a:latin typeface="맑은 고딕"/>
+                <a:ea typeface="맑은 고딕"/>
+                <a:cs typeface="맑은 고딕"/>
               </a:rPr>
               <a:t>●  </a:t>
             </a:r>
@@ -5136,6 +5158,8 @@
                   <a:srgbClr val="222733"/>
                 </a:solidFill>
                 <a:latin typeface="맑은 고딕"/>
+                <a:ea typeface="맑은 고딕"/>
+                <a:cs typeface="맑은 고딕"/>
               </a:rPr>
               <a:t>minikube service myapp --url 로 URL 확인 후 curl로 접속 확인</a:t>
             </a:r>
@@ -5152,6 +5176,8 @@
                   <a:srgbClr val="0D9488"/>
                 </a:solidFill>
                 <a:latin typeface="맑은 고딕"/>
+                <a:ea typeface="맑은 고딕"/>
+                <a:cs typeface="맑은 고딕"/>
               </a:rPr>
               <a:t>●  </a:t>
             </a:r>
@@ -5161,6 +5187,8 @@
                   <a:srgbClr val="222733"/>
                 </a:solidFill>
                 <a:latin typeface="맑은 고딕"/>
+                <a:ea typeface="맑은 고딕"/>
+                <a:cs typeface="맑은 고딕"/>
               </a:rPr>
               <a:t>결과 캡처 후 LMS 제출</a:t>
             </a:r>
@@ -5196,6 +5224,8 @@
                   <a:srgbClr val="5B6373"/>
                 </a:solidFill>
                 <a:latin typeface="맑은 고딕"/>
+                <a:ea typeface="맑은 고딕"/>
+                <a:cs typeface="맑은 고딕"/>
               </a:rPr>
               <a:t>클라우드인프라관리  ·  5주차 2차시</a:t>
             </a:r>
@@ -5231,6 +5261,8 @@
                   <a:srgbClr val="5B6373"/>
                 </a:solidFill>
                 <a:latin typeface="맑은 고딕"/>
+                <a:ea typeface="맑은 고딕"/>
+                <a:cs typeface="맑은 고딕"/>
               </a:rPr>
               <a:t>10 / 12</a:t>
             </a:r>
@@ -5416,6 +5448,8 @@
                   <a:srgbClr val="FFFFFF"/>
                 </a:solidFill>
                 <a:latin typeface="맑은 고딕"/>
+                <a:ea typeface="맑은 고딕"/>
+                <a:cs typeface="맑은 고딕"/>
               </a:rPr>
               <a:t>오늘의 정리</a:t>
             </a:r>
@@ -5469,6 +5503,8 @@
                   <a:srgbClr val="14213D"/>
                 </a:solidFill>
                 <a:latin typeface="맑은 고딕"/>
+                <a:ea typeface="맑은 고딕"/>
+                <a:cs typeface="맑은 고딕"/>
               </a:rPr>
               <a:t>1</a:t>
             </a:r>
@@ -5504,6 +5540,8 @@
                   <a:srgbClr val="FFFFFF"/>
                 </a:solidFill>
                 <a:latin typeface="맑은 고딕"/>
+                <a:ea typeface="맑은 고딕"/>
+                <a:cs typeface="맑은 고딕"/>
               </a:rPr>
               <a:t>ClusterIP(내부) / NodePort(로컬 테스트용 외부) / LoadBalancer(운영용 외부)</a:t>
             </a:r>
@@ -5557,6 +5595,8 @@
                   <a:srgbClr val="14213D"/>
                 </a:solidFill>
                 <a:latin typeface="맑은 고딕"/>
+                <a:ea typeface="맑은 고딕"/>
+                <a:cs typeface="맑은 고딕"/>
               </a:rPr>
               <a:t>2</a:t>
             </a:r>
@@ -5592,6 +5632,8 @@
                   <a:srgbClr val="FFFFFF"/>
                 </a:solidFill>
                 <a:latin typeface="맑은 고딕"/>
+                <a:ea typeface="맑은 고딕"/>
+                <a:cs typeface="맑은 고딕"/>
               </a:rPr>
               <a:t>로컬 minikube 환경에서는 NodePort로 외부 접속을 실습한다</a:t>
             </a:r>
@@ -5733,6 +5775,8 @@
                   <a:srgbClr val="FFFFFF"/>
                 </a:solidFill>
                 <a:latin typeface="맑은 고딕"/>
+                <a:ea typeface="맑은 고딕"/>
+                <a:cs typeface="맑은 고딕"/>
               </a:rPr>
               <a:t>다음 차시 예고</a:t>
             </a:r>
@@ -5768,6 +5812,8 @@
                   <a:srgbClr val="14B8A6"/>
                 </a:solidFill>
                 <a:latin typeface="맑은 고딕"/>
+                <a:ea typeface="맑은 고딕"/>
+                <a:cs typeface="맑은 고딕"/>
               </a:rPr>
               <a:t>다음 차시 예고 — 5주차 3차시</a:t>
             </a:r>
@@ -5803,6 +5849,8 @@
                   <a:srgbClr val="FFFFFF"/>
                 </a:solidFill>
                 <a:latin typeface="맑은 고딕"/>
+                <a:ea typeface="맑은 고딕"/>
+                <a:cs typeface="맑은 고딕"/>
               </a:rPr>
               <a:t>Service가 실제로 어떤 Pod들에 연결되어 있는지 Endpoints로 확인하고, 여러 Pod로 트래픽이 고르게 분산되는 라운드로빈을 직접 확인합니다.</a:t>
             </a:r>
@@ -5944,6 +5992,8 @@
                   <a:srgbClr val="14B8A6"/>
                 </a:solidFill>
                 <a:latin typeface="맑은 고딕"/>
+                <a:ea typeface="맑은 고딕"/>
+                <a:cs typeface="맑은 고딕"/>
               </a:rPr>
               <a:t>SESSION OVERVIEW</a:t>
             </a:r>
@@ -5979,6 +6029,8 @@
                   <a:srgbClr val="FFFFFF"/>
                 </a:solidFill>
                 <a:latin typeface="맑은 고딕"/>
+                <a:ea typeface="맑은 고딕"/>
+                <a:cs typeface="맑은 고딕"/>
               </a:rPr>
               <a:t>오늘의 학습 목표</a:t>
             </a:r>
@@ -6018,6 +6070,8 @@
                   <a:srgbClr val="222733"/>
                 </a:solidFill>
                 <a:latin typeface="맑은 고딕"/>
+                <a:ea typeface="맑은 고딕"/>
+                <a:cs typeface="맑은 고딕"/>
               </a:rPr>
               <a:t>1.  ClusterIP·NodePort·LoadBalancer 세 타입의 차이를 이해한다</a:t>
             </a:r>
@@ -6034,6 +6088,8 @@
                   <a:srgbClr val="222733"/>
                 </a:solidFill>
                 <a:latin typeface="맑은 고딕"/>
+                <a:ea typeface="맑은 고딕"/>
+                <a:cs typeface="맑은 고딕"/>
               </a:rPr>
               <a:t>2.  상황에 맞는 Service 타입을 고를 수 있다</a:t>
             </a:r>
@@ -6050,6 +6106,8 @@
                   <a:srgbClr val="222733"/>
                 </a:solidFill>
                 <a:latin typeface="맑은 고딕"/>
+                <a:ea typeface="맑은 고딕"/>
+                <a:cs typeface="맑은 고딕"/>
               </a:rPr>
               <a:t>3.  NodePort Service를 만들어 외부에서 접속해본다</a:t>
             </a:r>
@@ -6085,6 +6143,8 @@
                   <a:srgbClr val="5B6373"/>
                 </a:solidFill>
                 <a:latin typeface="맑은 고딕"/>
+                <a:ea typeface="맑은 고딕"/>
+                <a:cs typeface="맑은 고딕"/>
               </a:rPr>
               <a:t>클라우드인프라관리  ·  5주차 2차시</a:t>
             </a:r>
@@ -6120,6 +6180,8 @@
                   <a:srgbClr val="5B6373"/>
                 </a:solidFill>
                 <a:latin typeface="맑은 고딕"/>
+                <a:ea typeface="맑은 고딕"/>
+                <a:cs typeface="맑은 고딕"/>
               </a:rPr>
               <a:t>02 / 12</a:t>
             </a:r>
@@ -6305,6 +6367,8 @@
                   <a:srgbClr val="14B8A6"/>
                 </a:solidFill>
                 <a:latin typeface="맑은 고딕"/>
+                <a:ea typeface="맑은 고딕"/>
+                <a:cs typeface="맑은 고딕"/>
               </a:rPr>
               <a:t>SESSION OVERVIEW</a:t>
             </a:r>
@@ -6340,6 +6404,8 @@
                   <a:srgbClr val="FFFFFF"/>
                 </a:solidFill>
                 <a:latin typeface="맑은 고딕"/>
+                <a:ea typeface="맑은 고딕"/>
+                <a:cs typeface="맑은 고딕"/>
               </a:rPr>
               <a:t>오늘의 진행 순서</a:t>
             </a:r>
@@ -6551,6 +6617,8 @@
                   <a:srgbClr val="FFFFFF"/>
                 </a:solidFill>
                 <a:latin typeface="맑은 고딕"/>
+                <a:ea typeface="맑은 고딕"/>
+                <a:cs typeface="맑은 고딕"/>
               </a:rPr>
               <a:t>1</a:t>
             </a:r>
@@ -6634,6 +6702,8 @@
                   <a:srgbClr val="14213D"/>
                 </a:solidFill>
                 <a:latin typeface="맑은 고딕"/>
+                <a:ea typeface="맑은 고딕"/>
+                <a:cs typeface="맑은 고딕"/>
               </a:rPr>
               <a:t>개념 설명</a:t>
             </a:r>
@@ -6673,6 +6743,8 @@
                   <a:srgbClr val="222733"/>
                 </a:solidFill>
                 <a:latin typeface="맑은 고딕"/>
+                <a:ea typeface="맑은 고딕"/>
+                <a:cs typeface="맑은 고딕"/>
               </a:rPr>
               <a:t>강의자료 기반 직접 강의</a:t>
             </a:r>
@@ -6752,6 +6824,8 @@
                   <a:srgbClr val="FFFFFF"/>
                 </a:solidFill>
                 <a:latin typeface="맑은 고딕"/>
+                <a:ea typeface="맑은 고딕"/>
+                <a:cs typeface="맑은 고딕"/>
               </a:rPr>
               <a:t>2</a:t>
             </a:r>
@@ -6835,6 +6909,8 @@
                   <a:srgbClr val="14213D"/>
                 </a:solidFill>
                 <a:latin typeface="맑은 고딕"/>
+                <a:ea typeface="맑은 고딕"/>
+                <a:cs typeface="맑은 고딕"/>
               </a:rPr>
               <a:t>Killercoda</a:t>
             </a:r>
@@ -6874,6 +6950,8 @@
                   <a:srgbClr val="222733"/>
                 </a:solidFill>
                 <a:latin typeface="맑은 고딕"/>
+                <a:ea typeface="맑은 고딕"/>
+                <a:cs typeface="맑은 고딕"/>
               </a:rPr>
               <a:t>NodePort 접속 실습</a:t>
             </a:r>
@@ -6953,6 +7031,8 @@
                   <a:srgbClr val="FFFFFF"/>
                 </a:solidFill>
                 <a:latin typeface="맑은 고딕"/>
+                <a:ea typeface="맑은 고딕"/>
+                <a:cs typeface="맑은 고딕"/>
               </a:rPr>
               <a:t>3</a:t>
             </a:r>
@@ -7036,6 +7116,8 @@
                   <a:srgbClr val="14213D"/>
                 </a:solidFill>
                 <a:latin typeface="맑은 고딕"/>
+                <a:ea typeface="맑은 고딕"/>
+                <a:cs typeface="맑은 고딕"/>
               </a:rPr>
               <a:t>VM 안내</a:t>
             </a:r>
@@ -7075,6 +7157,8 @@
                   <a:srgbClr val="222733"/>
                 </a:solidFill>
                 <a:latin typeface="맑은 고딕"/>
+                <a:ea typeface="맑은 고딕"/>
+                <a:cs typeface="맑은 고딕"/>
               </a:rPr>
               <a:t>VM에서 동일 실습</a:t>
             </a:r>
@@ -7154,6 +7238,8 @@
                   <a:srgbClr val="FFFFFF"/>
                 </a:solidFill>
                 <a:latin typeface="맑은 고딕"/>
+                <a:ea typeface="맑은 고딕"/>
+                <a:cs typeface="맑은 고딕"/>
               </a:rPr>
               <a:t>4</a:t>
             </a:r>
@@ -7237,6 +7323,8 @@
                   <a:srgbClr val="14213D"/>
                 </a:solidFill>
                 <a:latin typeface="맑은 고딕"/>
+                <a:ea typeface="맑은 고딕"/>
+                <a:cs typeface="맑은 고딕"/>
               </a:rPr>
               <a:t>결과 제출</a:t>
             </a:r>
@@ -7276,6 +7364,8 @@
                   <a:srgbClr val="222733"/>
                 </a:solidFill>
                 <a:latin typeface="맑은 고딕"/>
+                <a:ea typeface="맑은 고딕"/>
+                <a:cs typeface="맑은 고딕"/>
               </a:rPr>
               <a:t>체크리스트 제출</a:t>
             </a:r>
@@ -7311,6 +7401,8 @@
                   <a:srgbClr val="5B6373"/>
                 </a:solidFill>
                 <a:latin typeface="맑은 고딕"/>
+                <a:ea typeface="맑은 고딕"/>
+                <a:cs typeface="맑은 고딕"/>
               </a:rPr>
               <a:t>클라우드인프라관리  ·  5주차 2차시</a:t>
             </a:r>
@@ -7346,6 +7438,8 @@
                   <a:srgbClr val="5B6373"/>
                 </a:solidFill>
                 <a:latin typeface="맑은 고딕"/>
+                <a:ea typeface="맑은 고딕"/>
+                <a:cs typeface="맑은 고딕"/>
               </a:rPr>
               <a:t>03 / 12</a:t>
             </a:r>
@@ -7549,6 +7643,8 @@
                   <a:srgbClr val="14213D"/>
                 </a:solidFill>
                 <a:latin typeface="맑은 고딕"/>
+                <a:ea typeface="맑은 고딕"/>
+                <a:cs typeface="맑은 고딕"/>
               </a:rPr>
               <a:t>PART 01</a:t>
             </a:r>
@@ -7584,6 +7680,8 @@
                   <a:srgbClr val="FFFFFF"/>
                 </a:solidFill>
                 <a:latin typeface="맑은 고딕"/>
+                <a:ea typeface="맑은 고딕"/>
+                <a:cs typeface="맑은 고딕"/>
               </a:rPr>
               <a:t>Service의 세 가지 타입</a:t>
             </a:r>
@@ -7619,6 +7717,8 @@
                   <a:srgbClr val="C9D3E6"/>
                 </a:solidFill>
                 <a:latin typeface="맑은 고딕"/>
+                <a:ea typeface="맑은 고딕"/>
+                <a:cs typeface="맑은 고딕"/>
               </a:rPr>
               <a:t>누가 접속할 수 있는가에 따라 구분</a:t>
             </a:r>
@@ -7778,6 +7878,8 @@
                   <a:srgbClr val="14213D"/>
                 </a:solidFill>
                 <a:latin typeface="맑은 고딕"/>
+                <a:ea typeface="맑은 고딕"/>
+                <a:cs typeface="맑은 고딕"/>
               </a:rPr>
               <a:t>01</a:t>
             </a:r>
@@ -7813,6 +7915,8 @@
                   <a:srgbClr val="14B8A6"/>
                 </a:solidFill>
                 <a:latin typeface="맑은 고딕"/>
+                <a:ea typeface="맑은 고딕"/>
+                <a:cs typeface="맑은 고딕"/>
               </a:rPr>
               <a:t>PART 1 · Service의 세 가지 타입</a:t>
             </a:r>
@@ -7848,6 +7952,8 @@
                   <a:srgbClr val="FFFFFF"/>
                 </a:solidFill>
                 <a:latin typeface="맑은 고딕"/>
+                <a:ea typeface="맑은 고딕"/>
+                <a:cs typeface="맑은 고딕"/>
               </a:rPr>
               <a:t>ClusterIP vs NodePort vs LoadBalancer</a:t>
             </a:r>
@@ -7927,6 +8033,8 @@
                   <a:srgbClr val="FFFFFF"/>
                 </a:solidFill>
                 <a:latin typeface="맑은 고딕"/>
+                <a:ea typeface="맑은 고딕"/>
+                <a:cs typeface="맑은 고딕"/>
               </a:rPr>
               <a:t>타입</a:t>
             </a:r>
@@ -8006,6 +8114,8 @@
                   <a:srgbClr val="FFFFFF"/>
                 </a:solidFill>
                 <a:latin typeface="맑은 고딕"/>
+                <a:ea typeface="맑은 고딕"/>
+                <a:cs typeface="맑은 고딕"/>
               </a:rPr>
               <a:t>접속 범위</a:t>
             </a:r>
@@ -8085,6 +8195,8 @@
                   <a:srgbClr val="FFFFFF"/>
                 </a:solidFill>
                 <a:latin typeface="맑은 고딕"/>
+                <a:ea typeface="맑은 고딕"/>
+                <a:cs typeface="맑은 고딕"/>
               </a:rPr>
               <a:t>주 용도</a:t>
             </a:r>
@@ -8164,6 +8276,8 @@
                   <a:srgbClr val="14213D"/>
                 </a:solidFill>
                 <a:latin typeface="맑은 고딕"/>
+                <a:ea typeface="맑은 고딕"/>
+                <a:cs typeface="맑은 고딕"/>
               </a:rPr>
               <a:t>ClusterIP (기본값)</a:t>
             </a:r>
@@ -8243,6 +8357,8 @@
                   <a:srgbClr val="222733"/>
                 </a:solidFill>
                 <a:latin typeface="맑은 고딕"/>
+                <a:ea typeface="맑은 고딕"/>
+                <a:cs typeface="맑은 고딕"/>
               </a:rPr>
               <a:t>클러스터 내부에서만</a:t>
             </a:r>
@@ -8322,6 +8438,8 @@
                   <a:srgbClr val="222733"/>
                 </a:solidFill>
                 <a:latin typeface="맑은 고딕"/>
+                <a:ea typeface="맑은 고딕"/>
+                <a:cs typeface="맑은 고딕"/>
               </a:rPr>
               <a:t>Pod끼리 내부 통신 (예: 앱→DB)</a:t>
             </a:r>
@@ -8401,6 +8519,8 @@
                   <a:srgbClr val="14213D"/>
                 </a:solidFill>
                 <a:latin typeface="맑은 고딕"/>
+                <a:ea typeface="맑은 고딕"/>
+                <a:cs typeface="맑은 고딕"/>
               </a:rPr>
               <a:t>NodePort</a:t>
             </a:r>
@@ -8480,6 +8600,8 @@
                   <a:srgbClr val="222733"/>
                 </a:solidFill>
                 <a:latin typeface="맑은 고딕"/>
+                <a:ea typeface="맑은 고딕"/>
+                <a:cs typeface="맑은 고딕"/>
               </a:rPr>
               <a:t>클러스터 밖에서도 (노드IP:포트)</a:t>
             </a:r>
@@ -8559,6 +8681,8 @@
                   <a:srgbClr val="222733"/>
                 </a:solidFill>
                 <a:latin typeface="맑은 고딕"/>
+                <a:ea typeface="맑은 고딕"/>
+                <a:cs typeface="맑은 고딕"/>
               </a:rPr>
               <a:t>개발·테스트 환경에서 외부 접속</a:t>
             </a:r>
@@ -8638,6 +8762,8 @@
                   <a:srgbClr val="14213D"/>
                 </a:solidFill>
                 <a:latin typeface="맑은 고딕"/>
+                <a:ea typeface="맑은 고딕"/>
+                <a:cs typeface="맑은 고딕"/>
               </a:rPr>
               <a:t>LoadBalancer</a:t>
             </a:r>
@@ -8717,6 +8843,8 @@
                   <a:srgbClr val="222733"/>
                 </a:solidFill>
                 <a:latin typeface="맑은 고딕"/>
+                <a:ea typeface="맑은 고딕"/>
+                <a:cs typeface="맑은 고딕"/>
               </a:rPr>
               <a:t>클라우드의 로드밸런서를 통해</a:t>
             </a:r>
@@ -8796,6 +8924,8 @@
                   <a:srgbClr val="222733"/>
                 </a:solidFill>
                 <a:latin typeface="맑은 고딕"/>
+                <a:ea typeface="맑은 고딕"/>
+                <a:cs typeface="맑은 고딕"/>
               </a:rPr>
               <a:t>운영 환경에서 실제 서비스 공개</a:t>
             </a:r>
@@ -8831,6 +8961,8 @@
                   <a:srgbClr val="5B6373"/>
                 </a:solidFill>
                 <a:latin typeface="맑은 고딕"/>
+                <a:ea typeface="맑은 고딕"/>
+                <a:cs typeface="맑은 고딕"/>
               </a:rPr>
               <a:t>클라우드인프라관리  ·  5주차 2차시</a:t>
             </a:r>
@@ -8866,6 +8998,8 @@
                   <a:srgbClr val="5B6373"/>
                 </a:solidFill>
                 <a:latin typeface="맑은 고딕"/>
+                <a:ea typeface="맑은 고딕"/>
+                <a:cs typeface="맑은 고딕"/>
               </a:rPr>
               <a:t>05 / 12</a:t>
             </a:r>
@@ -9069,6 +9203,8 @@
                   <a:srgbClr val="14213D"/>
                 </a:solidFill>
                 <a:latin typeface="맑은 고딕"/>
+                <a:ea typeface="맑은 고딕"/>
+                <a:cs typeface="맑은 고딕"/>
               </a:rPr>
               <a:t>01</a:t>
             </a:r>
@@ -9104,6 +9240,8 @@
                   <a:srgbClr val="14B8A6"/>
                 </a:solidFill>
                 <a:latin typeface="맑은 고딕"/>
+                <a:ea typeface="맑은 고딕"/>
+                <a:cs typeface="맑은 고딕"/>
               </a:rPr>
               <a:t>PART 1 · Service의 세 가지 타입</a:t>
             </a:r>
@@ -9139,6 +9277,8 @@
                   <a:srgbClr val="FFFFFF"/>
                 </a:solidFill>
                 <a:latin typeface="맑은 고딕"/>
+                <a:ea typeface="맑은 고딕"/>
+                <a:cs typeface="맑은 고딕"/>
               </a:rPr>
               <a:t>우리는 왜 NodePort를 쓸까</a:t>
             </a:r>
@@ -9178,6 +9318,8 @@
                   <a:srgbClr val="0D9488"/>
                 </a:solidFill>
                 <a:latin typeface="맑은 고딕"/>
+                <a:ea typeface="맑은 고딕"/>
+                <a:cs typeface="맑은 고딕"/>
               </a:rPr>
               <a:t>●  </a:t>
             </a:r>
@@ -9187,6 +9329,8 @@
                   <a:srgbClr val="222733"/>
                 </a:solidFill>
                 <a:latin typeface="맑은 고딕"/>
+                <a:ea typeface="맑은 고딕"/>
+                <a:cs typeface="맑은 고딕"/>
               </a:rPr>
               <a:t>LoadBalancer는 AWS·GCP 같은 실제 클라우드 사업자가 있어야 동작</a:t>
             </a:r>
@@ -9203,6 +9347,8 @@
                   <a:srgbClr val="0D9488"/>
                 </a:solidFill>
                 <a:latin typeface="맑은 고딕"/>
+                <a:ea typeface="맑은 고딕"/>
+                <a:cs typeface="맑은 고딕"/>
               </a:rPr>
               <a:t>●  </a:t>
             </a:r>
@@ -9212,6 +9358,8 @@
                   <a:srgbClr val="222733"/>
                 </a:solidFill>
                 <a:latin typeface="맑은 고딕"/>
+                <a:ea typeface="맑은 고딕"/>
+                <a:cs typeface="맑은 고딕"/>
               </a:rPr>
               <a:t>minikube(로컬 환경)에는 그런 로드밸런서가 없음</a:t>
             </a:r>
@@ -9228,6 +9376,8 @@
                   <a:srgbClr val="0D9488"/>
                 </a:solidFill>
                 <a:latin typeface="맑은 고딕"/>
+                <a:ea typeface="맑은 고딕"/>
+                <a:cs typeface="맑은 고딕"/>
               </a:rPr>
               <a:t>●  </a:t>
             </a:r>
@@ -9237,6 +9387,8 @@
                   <a:srgbClr val="222733"/>
                 </a:solidFill>
                 <a:latin typeface="맑은 고딕"/>
+                <a:ea typeface="맑은 고딕"/>
+                <a:cs typeface="맑은 고딕"/>
               </a:rPr>
               <a:t>그래서 로컬 실습에서는 NodePort로 외부 접속을 흉내냄</a:t>
             </a:r>
@@ -9316,6 +9468,8 @@
                   <a:srgbClr val="FFFFFF"/>
                 </a:solidFill>
                 <a:latin typeface="맑은 고딕"/>
+                <a:ea typeface="맑은 고딕"/>
+                <a:cs typeface="맑은 고딕"/>
               </a:rPr>
               <a:t>🎯  오늘의 목표</a:t>
             </a:r>
@@ -9351,6 +9505,8 @@
                   <a:srgbClr val="FFFFFF"/>
                 </a:solidFill>
                 <a:latin typeface="맑은 고딕"/>
+                <a:ea typeface="맑은 고딕"/>
+                <a:cs typeface="맑은 고딕"/>
               </a:rPr>
               <a:t>NodePort Service를 만들어서 브라우저·curl로 우리 앱에 직접 접속해본다</a:t>
             </a:r>
@@ -9386,6 +9542,8 @@
                   <a:srgbClr val="5B6373"/>
                 </a:solidFill>
                 <a:latin typeface="맑은 고딕"/>
+                <a:ea typeface="맑은 고딕"/>
+                <a:cs typeface="맑은 고딕"/>
               </a:rPr>
               <a:t>클라우드인프라관리  ·  5주차 2차시</a:t>
             </a:r>
@@ -9421,6 +9579,8 @@
                   <a:srgbClr val="5B6373"/>
                 </a:solidFill>
                 <a:latin typeface="맑은 고딕"/>
+                <a:ea typeface="맑은 고딕"/>
+                <a:cs typeface="맑은 고딕"/>
               </a:rPr>
               <a:t>06 / 12</a:t>
             </a:r>
@@ -9624,6 +9784,8 @@
                   <a:srgbClr val="14213D"/>
                 </a:solidFill>
                 <a:latin typeface="맑은 고딕"/>
+                <a:ea typeface="맑은 고딕"/>
+                <a:cs typeface="맑은 고딕"/>
               </a:rPr>
               <a:t>PART 02</a:t>
             </a:r>
@@ -9659,6 +9821,8 @@
                   <a:srgbClr val="FFFFFF"/>
                 </a:solidFill>
                 <a:latin typeface="맑은 고딕"/>
+                <a:ea typeface="맑은 고딕"/>
+                <a:cs typeface="맑은 고딕"/>
               </a:rPr>
               <a:t>NodePort 실습</a:t>
             </a:r>
@@ -9694,6 +9858,8 @@
                   <a:srgbClr val="C9D3E6"/>
                 </a:solidFill>
                 <a:latin typeface="맑은 고딕"/>
+                <a:ea typeface="맑은 고딕"/>
+                <a:cs typeface="맑은 고딕"/>
               </a:rPr>
               <a:t>kubectl expose로 외부 접속 열기</a:t>
             </a:r>
@@ -9853,6 +10019,8 @@
                   <a:srgbClr val="14213D"/>
                 </a:solidFill>
                 <a:latin typeface="맑은 고딕"/>
+                <a:ea typeface="맑은 고딕"/>
+                <a:cs typeface="맑은 고딕"/>
               </a:rPr>
               <a:t>02</a:t>
             </a:r>
@@ -9888,6 +10056,8 @@
                   <a:srgbClr val="14B8A6"/>
                 </a:solidFill>
                 <a:latin typeface="맑은 고딕"/>
+                <a:ea typeface="맑은 고딕"/>
+                <a:cs typeface="맑은 고딕"/>
               </a:rPr>
               <a:t>PART 2 · NodePort 실습</a:t>
             </a:r>
@@ -9923,6 +10093,8 @@
                   <a:srgbClr val="FFFFFF"/>
                 </a:solidFill>
                 <a:latin typeface="맑은 고딕"/>
+                <a:ea typeface="맑은 고딕"/>
+                <a:cs typeface="맑은 고딕"/>
               </a:rPr>
               <a:t>명령어로 Service 만들기</a:t>
             </a:r>
@@ -9962,6 +10134,8 @@
                   <a:srgbClr val="0D9488"/>
                 </a:solidFill>
                 <a:latin typeface="맑은 고딕"/>
+                <a:ea typeface="맑은 고딕"/>
+                <a:cs typeface="맑은 고딕"/>
               </a:rPr>
               <a:t>●  </a:t>
             </a:r>
@@ -9971,6 +10145,8 @@
                   <a:srgbClr val="222733"/>
                 </a:solidFill>
                 <a:latin typeface="맑은 고딕"/>
+                <a:ea typeface="맑은 고딕"/>
+                <a:cs typeface="맑은 고딕"/>
               </a:rPr>
               <a:t>kubectl expose deployment myapp --type=NodePort --port=80</a:t>
             </a:r>
@@ -9987,6 +10163,8 @@
                   <a:srgbClr val="0D9488"/>
                 </a:solidFill>
                 <a:latin typeface="맑은 고딕"/>
+                <a:ea typeface="맑은 고딕"/>
+                <a:cs typeface="맑은 고딕"/>
               </a:rPr>
               <a:t>●  </a:t>
             </a:r>
@@ -9996,6 +10174,8 @@
                   <a:srgbClr val="222733"/>
                 </a:solidFill>
                 <a:latin typeface="맑은 고딕"/>
+                <a:ea typeface="맑은 고딕"/>
+                <a:cs typeface="맑은 고딕"/>
               </a:rPr>
               <a:t>kubectl get svc myapp  — 할당된 NodePort 번호 확인</a:t>
             </a:r>
@@ -10012,6 +10192,8 @@
                   <a:srgbClr val="0D9488"/>
                 </a:solidFill>
                 <a:latin typeface="맑은 고딕"/>
+                <a:ea typeface="맑은 고딕"/>
+                <a:cs typeface="맑은 고딕"/>
               </a:rPr>
               <a:t>●  </a:t>
             </a:r>
@@ -10021,6 +10203,8 @@
                   <a:srgbClr val="222733"/>
                 </a:solidFill>
                 <a:latin typeface="맑은 고딕"/>
+                <a:ea typeface="맑은 고딕"/>
+                <a:cs typeface="맑은 고딕"/>
               </a:rPr>
               <a:t>minikube service myapp --url  — 접속 가능한 전체 URL 바로 확인</a:t>
             </a:r>
@@ -10056,6 +10240,8 @@
                   <a:srgbClr val="5B6373"/>
                 </a:solidFill>
                 <a:latin typeface="맑은 고딕"/>
+                <a:ea typeface="맑은 고딕"/>
+                <a:cs typeface="맑은 고딕"/>
               </a:rPr>
               <a:t>클라우드인프라관리  ·  5주차 2차시</a:t>
             </a:r>
@@ -10091,6 +10277,8 @@
                   <a:srgbClr val="5B6373"/>
                 </a:solidFill>
                 <a:latin typeface="맑은 고딕"/>
+                <a:ea typeface="맑은 고딕"/>
+                <a:cs typeface="맑은 고딕"/>
               </a:rPr>
               <a:t>08 / 12</a:t>
             </a:r>
@@ -10294,6 +10482,8 @@
                   <a:srgbClr val="14213D"/>
                 </a:solidFill>
                 <a:latin typeface="맑은 고딕"/>
+                <a:ea typeface="맑은 고딕"/>
+                <a:cs typeface="맑은 고딕"/>
               </a:rPr>
               <a:t>03</a:t>
             </a:r>
@@ -10329,6 +10519,8 @@
                   <a:srgbClr val="14B8A6"/>
                 </a:solidFill>
                 <a:latin typeface="맑은 고딕"/>
+                <a:ea typeface="맑은 고딕"/>
+                <a:cs typeface="맑은 고딕"/>
               </a:rPr>
               <a:t>실습 안내</a:t>
             </a:r>
@@ -10364,6 +10556,8 @@
                   <a:srgbClr val="FFFFFF"/>
                 </a:solidFill>
                 <a:latin typeface="맑은 고딕"/>
+                <a:ea typeface="맑은 고딕"/>
+                <a:cs typeface="맑은 고딕"/>
               </a:rPr>
               <a:t>Killercoda — NodePort 접속</a:t>
             </a:r>
@@ -10403,6 +10597,8 @@
                   <a:srgbClr val="0D9488"/>
                 </a:solidFill>
                 <a:latin typeface="맑은 고딕"/>
+                <a:ea typeface="맑은 고딕"/>
+                <a:cs typeface="맑은 고딕"/>
               </a:rPr>
               <a:t>●  </a:t>
             </a:r>
@@ -10412,6 +10608,8 @@
                   <a:srgbClr val="222733"/>
                 </a:solidFill>
                 <a:latin typeface="맑은 고딕"/>
+                <a:ea typeface="맑은 고딕"/>
+                <a:cs typeface="맑은 고딕"/>
               </a:rPr>
               <a:t>kubectl expose deployment myapp --type=NodePort --port=80</a:t>
             </a:r>
@@ -10428,6 +10626,8 @@
                   <a:srgbClr val="0D9488"/>
                 </a:solidFill>
                 <a:latin typeface="맑은 고딕"/>
+                <a:ea typeface="맑은 고딕"/>
+                <a:cs typeface="맑은 고딕"/>
               </a:rPr>
               <a:t>●  </a:t>
             </a:r>
@@ -10437,6 +10637,8 @@
                   <a:srgbClr val="222733"/>
                 </a:solidFill>
                 <a:latin typeface="맑은 고딕"/>
+                <a:ea typeface="맑은 고딕"/>
+                <a:cs typeface="맑은 고딕"/>
               </a:rPr>
               <a:t>kubectl get svc myapp</a:t>
             </a:r>
@@ -10453,6 +10655,8 @@
                   <a:srgbClr val="0D9488"/>
                 </a:solidFill>
                 <a:latin typeface="맑은 고딕"/>
+                <a:ea typeface="맑은 고딕"/>
+                <a:cs typeface="맑은 고딕"/>
               </a:rPr>
               <a:t>●  </a:t>
             </a:r>
@@ -10462,6 +10666,8 @@
                   <a:srgbClr val="222733"/>
                 </a:solidFill>
                 <a:latin typeface="맑은 고딕"/>
+                <a:ea typeface="맑은 고딕"/>
+                <a:cs typeface="맑은 고딕"/>
               </a:rPr>
               <a:t>브라우저 또는 curl로 해당 포트 접속 → nginx 기본 페이지 확인</a:t>
             </a:r>
@@ -10497,6 +10703,8 @@
                   <a:srgbClr val="5B6373"/>
                 </a:solidFill>
                 <a:latin typeface="맑은 고딕"/>
+                <a:ea typeface="맑은 고딕"/>
+                <a:cs typeface="맑은 고딕"/>
               </a:rPr>
               <a:t>클라우드인프라관리  ·  5주차 2차시</a:t>
             </a:r>
@@ -10532,6 +10740,8 @@
                   <a:srgbClr val="5B6373"/>
                 </a:solidFill>
                 <a:latin typeface="맑은 고딕"/>
+                <a:ea typeface="맑은 고딕"/>
+                <a:cs typeface="맑은 고딕"/>
               </a:rPr>
               <a:t>09 / 12</a:t>
             </a:r>
